--- a/07_Methoden/07_Methoden.pptx
+++ b/07_Methoden/07_Methoden.pptx
@@ -170,6 +170,9 @@
         </p15:guide>
       </p15:sldGuideLst>
     </p:ext>
+    <p:ext uri="{2D200454-40CA-4A62-9FC3-DE9A4176ACB9}">
+      <p15:notesGuideLst xmlns:p15="http://schemas.microsoft.com/office/powerpoint/2012/main"/>
+    </p:ext>
   </p:extLst>
 </p:presentation>
 </file>
@@ -533,7 +536,7 @@
         <p:nvSpPr>
           <p:cNvPr id="8196" name="Rectangle 4"/>
           <p:cNvSpPr>
-            <a:spLocks noChangeArrowheads="1" noTextEdit="1"/>
+            <a:spLocks noGrp="1" noRot="1" noChangeAspect="1" noChangeArrowheads="1" noTextEdit="1"/>
           </p:cNvSpPr>
           <p:nvPr>
             <p:ph type="sldImg" idx="2"/>
@@ -603,94 +606,94 @@
           <a:p>
             <a:pPr lvl="0"/>
             <a:r>
-              <a:rPr lang="de-DE" noProof="0" dirty="0" smtClean="0"/>
+              <a:rPr lang="de-DE" noProof="0" dirty="0"/>
               <a:t>Click </a:t>
             </a:r>
             <a:r>
-              <a:rPr lang="de-DE" noProof="0" dirty="0" err="1" smtClean="0"/>
+              <a:rPr lang="de-DE" noProof="0" dirty="0" err="1"/>
               <a:t>to</a:t>
             </a:r>
             <a:r>
-              <a:rPr lang="de-DE" noProof="0" dirty="0" smtClean="0"/>
+              <a:rPr lang="de-DE" noProof="0" dirty="0"/>
               <a:t> </a:t>
             </a:r>
             <a:r>
-              <a:rPr lang="de-DE" noProof="0" dirty="0" err="1" smtClean="0"/>
+              <a:rPr lang="de-DE" noProof="0" dirty="0" err="1"/>
               <a:t>edit</a:t>
             </a:r>
             <a:r>
-              <a:rPr lang="de-DE" noProof="0" dirty="0" smtClean="0"/>
+              <a:rPr lang="de-DE" noProof="0" dirty="0"/>
               <a:t> Master </a:t>
             </a:r>
             <a:r>
-              <a:rPr lang="de-DE" noProof="0" dirty="0" err="1" smtClean="0"/>
+              <a:rPr lang="de-DE" noProof="0" dirty="0" err="1"/>
               <a:t>text</a:t>
             </a:r>
             <a:r>
-              <a:rPr lang="de-DE" noProof="0" dirty="0" smtClean="0"/>
+              <a:rPr lang="de-DE" noProof="0" dirty="0"/>
               <a:t> </a:t>
             </a:r>
             <a:r>
-              <a:rPr lang="de-DE" noProof="0" dirty="0" err="1" smtClean="0"/>
+              <a:rPr lang="de-DE" noProof="0" dirty="0" err="1"/>
               <a:t>styles</a:t>
             </a:r>
-            <a:endParaRPr lang="de-DE" noProof="0" dirty="0" smtClean="0"/>
+            <a:endParaRPr lang="de-DE" noProof="0" dirty="0"/>
           </a:p>
           <a:p>
             <a:pPr lvl="1"/>
             <a:r>
-              <a:rPr lang="de-DE" noProof="0" dirty="0" smtClean="0"/>
+              <a:rPr lang="de-DE" noProof="0" dirty="0"/>
               <a:t>Second </a:t>
             </a:r>
             <a:r>
-              <a:rPr lang="de-DE" noProof="0" dirty="0" err="1" smtClean="0"/>
+              <a:rPr lang="de-DE" noProof="0" dirty="0" err="1"/>
               <a:t>level</a:t>
             </a:r>
-            <a:endParaRPr lang="de-DE" noProof="0" dirty="0" smtClean="0"/>
+            <a:endParaRPr lang="de-DE" noProof="0" dirty="0"/>
           </a:p>
           <a:p>
             <a:pPr lvl="2"/>
             <a:r>
-              <a:rPr lang="de-DE" noProof="0" dirty="0" smtClean="0"/>
+              <a:rPr lang="de-DE" noProof="0" dirty="0"/>
               <a:t>Third </a:t>
             </a:r>
             <a:r>
-              <a:rPr lang="de-DE" noProof="0" dirty="0" err="1" smtClean="0"/>
+              <a:rPr lang="de-DE" noProof="0" dirty="0" err="1"/>
               <a:t>level</a:t>
             </a:r>
-            <a:endParaRPr lang="de-DE" noProof="0" dirty="0" smtClean="0"/>
+            <a:endParaRPr lang="de-DE" noProof="0" dirty="0"/>
           </a:p>
           <a:p>
             <a:pPr lvl="3"/>
             <a:r>
-              <a:rPr lang="de-DE" noProof="0" dirty="0" err="1" smtClean="0"/>
+              <a:rPr lang="de-DE" noProof="0" dirty="0" err="1"/>
               <a:t>Fourth</a:t>
             </a:r>
             <a:r>
-              <a:rPr lang="de-DE" noProof="0" dirty="0" smtClean="0"/>
+              <a:rPr lang="de-DE" noProof="0" dirty="0"/>
               <a:t> </a:t>
             </a:r>
             <a:r>
-              <a:rPr lang="de-DE" noProof="0" dirty="0" err="1" smtClean="0"/>
+              <a:rPr lang="de-DE" noProof="0" dirty="0" err="1"/>
               <a:t>level</a:t>
             </a:r>
-            <a:endParaRPr lang="de-DE" noProof="0" dirty="0" smtClean="0"/>
+            <a:endParaRPr lang="de-DE" noProof="0" dirty="0"/>
           </a:p>
           <a:p>
             <a:pPr lvl="4"/>
             <a:r>
-              <a:rPr lang="de-DE" noProof="0" dirty="0" err="1" smtClean="0"/>
+              <a:rPr lang="de-DE" noProof="0" dirty="0" err="1"/>
               <a:t>Fifth</a:t>
             </a:r>
             <a:r>
-              <a:rPr lang="de-DE" noProof="0" dirty="0" smtClean="0"/>
+              <a:rPr lang="de-DE" noProof="0" dirty="0"/>
               <a:t> </a:t>
             </a:r>
             <a:r>
-              <a:rPr lang="de-DE" noProof="0" dirty="0" err="1" smtClean="0"/>
+              <a:rPr lang="de-DE" noProof="0" dirty="0" err="1"/>
               <a:t>level</a:t>
             </a:r>
-            <a:endParaRPr lang="de-DE" noProof="0" dirty="0" smtClean="0"/>
+            <a:endParaRPr lang="de-DE" noProof="0" dirty="0"/>
           </a:p>
         </p:txBody>
       </p:sp>
@@ -1066,7 +1069,7 @@
           </a:lstStyle>
           <a:p>
             <a:r>
-              <a:rPr lang="en-US" dirty="0" smtClean="0"/>
+              <a:rPr lang="en-US" dirty="0"/>
               <a:t>Titelmasterformat durch Klicken bearbeiten</a:t>
             </a:r>
             <a:endParaRPr lang="de-AT" dirty="0"/>
@@ -1117,7 +1120,7 @@
           <a:p>
             <a:pPr lvl="0"/>
             <a:r>
-              <a:rPr lang="en-US" dirty="0" smtClean="0"/>
+              <a:rPr lang="en-US" dirty="0"/>
               <a:t>Textmasterformate durch Klicken bearbeiten</a:t>
             </a:r>
           </a:p>
@@ -1180,7 +1183,7 @@
           </a:lstStyle>
           <a:p>
             <a:r>
-              <a:rPr lang="de-DE" dirty="0" smtClean="0"/>
+              <a:rPr lang="de-DE" dirty="0"/>
               <a:t>Titelmasterformat durch Klicken bearbeiten</a:t>
             </a:r>
             <a:endParaRPr lang="de-AT" dirty="0"/>
@@ -1248,7 +1251,7 @@
           <a:p>
             <a:pPr lvl="0"/>
             <a:r>
-              <a:rPr lang="de-DE" dirty="0" smtClean="0"/>
+              <a:rPr lang="de-DE" dirty="0"/>
               <a:t>Textmasterformate durch Klicken bearbeiten</a:t>
             </a:r>
           </a:p>
@@ -1397,7 +1400,7 @@
           </a:lstStyle>
           <a:p>
             <a:r>
-              <a:rPr lang="de-DE" dirty="0" smtClean="0"/>
+              <a:rPr lang="de-DE" dirty="0"/>
               <a:t>Titelmasterformat durch Klicken bearbeiten</a:t>
             </a:r>
             <a:endParaRPr lang="de-AT" dirty="0"/>
@@ -1464,35 +1467,35 @@
           <a:p>
             <a:pPr lvl="0"/>
             <a:r>
-              <a:rPr lang="de-DE" dirty="0" smtClean="0"/>
+              <a:rPr lang="de-DE" dirty="0"/>
               <a:t>Textmasterformate durch Klicken bearbeiten</a:t>
             </a:r>
           </a:p>
           <a:p>
             <a:pPr lvl="1"/>
             <a:r>
-              <a:rPr lang="de-DE" dirty="0" smtClean="0"/>
+              <a:rPr lang="de-DE" dirty="0"/>
               <a:t>Zweite Ebene</a:t>
             </a:r>
           </a:p>
           <a:p>
             <a:pPr lvl="2"/>
             <a:r>
-              <a:rPr lang="de-DE" dirty="0" smtClean="0"/>
+              <a:rPr lang="de-DE" dirty="0"/>
               <a:t>Dritte Ebene</a:t>
             </a:r>
           </a:p>
           <a:p>
             <a:pPr lvl="3"/>
             <a:r>
-              <a:rPr lang="de-DE" dirty="0" smtClean="0"/>
+              <a:rPr lang="de-DE" dirty="0"/>
               <a:t>Vierte Ebene</a:t>
             </a:r>
           </a:p>
           <a:p>
             <a:pPr lvl="4"/>
             <a:r>
-              <a:rPr lang="de-DE" dirty="0" smtClean="0"/>
+              <a:rPr lang="de-DE" dirty="0"/>
               <a:t>Fünfte Ebene</a:t>
             </a:r>
             <a:endParaRPr lang="de-AT" dirty="0"/>
@@ -1559,35 +1562,35 @@
           <a:p>
             <a:pPr lvl="0"/>
             <a:r>
-              <a:rPr lang="de-DE" dirty="0" smtClean="0"/>
+              <a:rPr lang="de-DE" dirty="0"/>
               <a:t>Textmasterformate durch Klicken bearbeiten</a:t>
             </a:r>
           </a:p>
           <a:p>
             <a:pPr lvl="1"/>
             <a:r>
-              <a:rPr lang="de-DE" dirty="0" smtClean="0"/>
+              <a:rPr lang="de-DE" dirty="0"/>
               <a:t>Zweite Ebene</a:t>
             </a:r>
           </a:p>
           <a:p>
             <a:pPr lvl="2"/>
             <a:r>
-              <a:rPr lang="de-DE" dirty="0" smtClean="0"/>
+              <a:rPr lang="de-DE" dirty="0"/>
               <a:t>Dritte Ebene</a:t>
             </a:r>
           </a:p>
           <a:p>
             <a:pPr lvl="3"/>
             <a:r>
-              <a:rPr lang="de-DE" dirty="0" smtClean="0"/>
+              <a:rPr lang="de-DE" dirty="0"/>
               <a:t>Vierte Ebene</a:t>
             </a:r>
           </a:p>
           <a:p>
             <a:pPr lvl="4"/>
             <a:r>
-              <a:rPr lang="de-DE" dirty="0" smtClean="0"/>
+              <a:rPr lang="de-DE" dirty="0"/>
               <a:t>Fünfte Ebene</a:t>
             </a:r>
             <a:endParaRPr lang="de-AT" dirty="0"/>
@@ -1742,7 +1745,7 @@
           </a:lstStyle>
           <a:p>
             <a:r>
-              <a:rPr lang="de-DE" dirty="0" smtClean="0"/>
+              <a:rPr lang="de-DE" dirty="0"/>
               <a:t>Titelmasterformat durch Klicken bearbeiten</a:t>
             </a:r>
             <a:endParaRPr lang="de-AT" dirty="0"/>
@@ -1810,7 +1813,7 @@
           <a:p>
             <a:pPr lvl="0"/>
             <a:r>
-              <a:rPr lang="de-DE" dirty="0" smtClean="0"/>
+              <a:rPr lang="de-DE" dirty="0"/>
               <a:t>Textmasterformate durch Klicken bearbeiten</a:t>
             </a:r>
           </a:p>
@@ -1876,35 +1879,35 @@
           <a:p>
             <a:pPr lvl="0"/>
             <a:r>
-              <a:rPr lang="de-DE" dirty="0" smtClean="0"/>
+              <a:rPr lang="de-DE" dirty="0"/>
               <a:t>Textmasterformate durch Klicken bearbeiten</a:t>
             </a:r>
           </a:p>
           <a:p>
             <a:pPr lvl="1"/>
             <a:r>
-              <a:rPr lang="de-DE" dirty="0" smtClean="0"/>
+              <a:rPr lang="de-DE" dirty="0"/>
               <a:t>Zweite Ebene</a:t>
             </a:r>
           </a:p>
           <a:p>
             <a:pPr lvl="2"/>
             <a:r>
-              <a:rPr lang="de-DE" dirty="0" smtClean="0"/>
+              <a:rPr lang="de-DE" dirty="0"/>
               <a:t>Dritte Ebene</a:t>
             </a:r>
           </a:p>
           <a:p>
             <a:pPr lvl="3"/>
             <a:r>
-              <a:rPr lang="de-DE" dirty="0" smtClean="0"/>
+              <a:rPr lang="de-DE" dirty="0"/>
               <a:t>Vierte Ebene</a:t>
             </a:r>
           </a:p>
           <a:p>
             <a:pPr lvl="4"/>
             <a:r>
-              <a:rPr lang="de-DE" dirty="0" smtClean="0"/>
+              <a:rPr lang="de-DE" dirty="0"/>
               <a:t>Fünfte Ebene</a:t>
             </a:r>
             <a:endParaRPr lang="de-AT" dirty="0"/>
@@ -1972,7 +1975,7 @@
           <a:p>
             <a:pPr lvl="0"/>
             <a:r>
-              <a:rPr lang="de-DE" dirty="0" smtClean="0"/>
+              <a:rPr lang="de-DE" dirty="0"/>
               <a:t>Textmasterformate durch Klicken bearbeiten</a:t>
             </a:r>
           </a:p>
@@ -2038,35 +2041,35 @@
           <a:p>
             <a:pPr lvl="0"/>
             <a:r>
-              <a:rPr lang="de-DE" dirty="0" smtClean="0"/>
+              <a:rPr lang="de-DE" dirty="0"/>
               <a:t>Textmasterformate durch Klicken bearbeiten</a:t>
             </a:r>
           </a:p>
           <a:p>
             <a:pPr lvl="1"/>
             <a:r>
-              <a:rPr lang="de-DE" dirty="0" smtClean="0"/>
+              <a:rPr lang="de-DE" dirty="0"/>
               <a:t>Zweite Ebene</a:t>
             </a:r>
           </a:p>
           <a:p>
             <a:pPr lvl="2"/>
             <a:r>
-              <a:rPr lang="de-DE" dirty="0" smtClean="0"/>
+              <a:rPr lang="de-DE" dirty="0"/>
               <a:t>Dritte Ebene</a:t>
             </a:r>
           </a:p>
           <a:p>
             <a:pPr lvl="3"/>
             <a:r>
-              <a:rPr lang="de-DE" dirty="0" smtClean="0"/>
+              <a:rPr lang="de-DE" dirty="0"/>
               <a:t>Vierte Ebene</a:t>
             </a:r>
           </a:p>
           <a:p>
             <a:pPr lvl="4"/>
             <a:r>
-              <a:rPr lang="de-DE" dirty="0" smtClean="0"/>
+              <a:rPr lang="de-DE" dirty="0"/>
               <a:t>Fünfte Ebene</a:t>
             </a:r>
             <a:endParaRPr lang="de-AT" dirty="0"/>
@@ -2216,7 +2219,7 @@
           </a:lstStyle>
           <a:p>
             <a:r>
-              <a:rPr lang="de-DE" dirty="0" smtClean="0"/>
+              <a:rPr lang="de-DE" dirty="0"/>
               <a:t>Titelmasterformat durch Klicken bearbeiten</a:t>
             </a:r>
             <a:endParaRPr lang="de-AT" dirty="0"/>
@@ -2492,7 +2495,7 @@
           </a:lstStyle>
           <a:p>
             <a:r>
-              <a:rPr lang="de-DE" dirty="0" smtClean="0"/>
+              <a:rPr lang="de-DE" dirty="0"/>
               <a:t>Titelmasterformat durch Klicken bearbeiten</a:t>
             </a:r>
             <a:endParaRPr lang="de-AT" dirty="0"/>
@@ -2559,35 +2562,35 @@
           <a:p>
             <a:pPr lvl="0"/>
             <a:r>
-              <a:rPr lang="de-DE" dirty="0" smtClean="0"/>
+              <a:rPr lang="de-DE" dirty="0"/>
               <a:t>Textmasterformate durch Klicken bearbeiten</a:t>
             </a:r>
           </a:p>
           <a:p>
             <a:pPr lvl="1"/>
             <a:r>
-              <a:rPr lang="de-DE" dirty="0" smtClean="0"/>
+              <a:rPr lang="de-DE" dirty="0"/>
               <a:t>Zweite Ebene</a:t>
             </a:r>
           </a:p>
           <a:p>
             <a:pPr lvl="2"/>
             <a:r>
-              <a:rPr lang="de-DE" dirty="0" smtClean="0"/>
+              <a:rPr lang="de-DE" dirty="0"/>
               <a:t>Dritte Ebene</a:t>
             </a:r>
           </a:p>
           <a:p>
             <a:pPr lvl="3"/>
             <a:r>
-              <a:rPr lang="de-DE" dirty="0" smtClean="0"/>
+              <a:rPr lang="de-DE" dirty="0"/>
               <a:t>Vierte Ebene</a:t>
             </a:r>
           </a:p>
           <a:p>
             <a:pPr lvl="4"/>
             <a:r>
-              <a:rPr lang="de-DE" dirty="0" smtClean="0"/>
+              <a:rPr lang="de-DE" dirty="0"/>
               <a:t>Fünfte Ebene</a:t>
             </a:r>
             <a:endParaRPr lang="de-AT" dirty="0"/>
@@ -2655,7 +2658,7 @@
           <a:p>
             <a:pPr lvl="0"/>
             <a:r>
-              <a:rPr lang="de-DE" dirty="0" smtClean="0"/>
+              <a:rPr lang="de-DE" dirty="0"/>
               <a:t>Textmasterformate durch Klicken bearbeiten</a:t>
             </a:r>
           </a:p>
@@ -2809,7 +2812,7 @@
           </a:lstStyle>
           <a:p>
             <a:r>
-              <a:rPr lang="de-DE" dirty="0" smtClean="0"/>
+              <a:rPr lang="de-DE" dirty="0"/>
               <a:t>Titelmasterformat durch Klicken bearbeiten</a:t>
             </a:r>
             <a:endParaRPr lang="de-AT" dirty="0"/>
@@ -2876,7 +2879,7 @@
           </a:lstStyle>
           <a:p>
             <a:pPr lvl="0"/>
-            <a:endParaRPr lang="de-AT" noProof="0" dirty="0" smtClean="0"/>
+            <a:endParaRPr lang="de-AT" noProof="0" dirty="0"/>
           </a:p>
         </p:txBody>
       </p:sp>
@@ -2941,7 +2944,7 @@
           <a:p>
             <a:pPr lvl="0"/>
             <a:r>
-              <a:rPr lang="de-DE" dirty="0" smtClean="0"/>
+              <a:rPr lang="de-DE" dirty="0"/>
               <a:t>Textmasterformate durch Klicken bearbeiten</a:t>
             </a:r>
           </a:p>
@@ -3090,7 +3093,7 @@
           </a:lstStyle>
           <a:p>
             <a:r>
-              <a:rPr lang="de-DE" dirty="0" smtClean="0"/>
+              <a:rPr lang="de-DE" dirty="0"/>
               <a:t>Titelmasterformat durch Klicken bearbeiten</a:t>
             </a:r>
             <a:endParaRPr lang="de-AT" dirty="0"/>
@@ -3140,35 +3143,35 @@
           <a:p>
             <a:pPr lvl="0"/>
             <a:r>
-              <a:rPr lang="de-DE" dirty="0" smtClean="0"/>
+              <a:rPr lang="de-DE" dirty="0"/>
               <a:t>Textmasterformate durch Klicken bearbeiten</a:t>
             </a:r>
           </a:p>
           <a:p>
             <a:pPr lvl="1"/>
             <a:r>
-              <a:rPr lang="de-DE" dirty="0" smtClean="0"/>
+              <a:rPr lang="de-DE" dirty="0"/>
               <a:t>Zweite Ebene</a:t>
             </a:r>
           </a:p>
           <a:p>
             <a:pPr lvl="2"/>
             <a:r>
-              <a:rPr lang="de-DE" dirty="0" smtClean="0"/>
+              <a:rPr lang="de-DE" dirty="0"/>
               <a:t>Dritte Ebene</a:t>
             </a:r>
           </a:p>
           <a:p>
             <a:pPr lvl="3"/>
             <a:r>
-              <a:rPr lang="de-DE" dirty="0" smtClean="0"/>
+              <a:rPr lang="de-DE" dirty="0"/>
               <a:t>Vierte Ebene</a:t>
             </a:r>
           </a:p>
           <a:p>
             <a:pPr lvl="4"/>
             <a:r>
-              <a:rPr lang="de-DE" dirty="0" smtClean="0"/>
+              <a:rPr lang="de-DE" dirty="0"/>
               <a:t>Fünfte Ebene</a:t>
             </a:r>
             <a:endParaRPr lang="de-AT" dirty="0"/>
@@ -3323,7 +3326,7 @@
           </a:lstStyle>
           <a:p>
             <a:r>
-              <a:rPr lang="de-DE" dirty="0" smtClean="0"/>
+              <a:rPr lang="de-DE" dirty="0"/>
               <a:t>Titelmasterformat durch Klicken bearbeiten</a:t>
             </a:r>
             <a:endParaRPr lang="de-AT" dirty="0"/>
@@ -3378,35 +3381,35 @@
           <a:p>
             <a:pPr lvl="0"/>
             <a:r>
-              <a:rPr lang="de-DE" dirty="0" smtClean="0"/>
+              <a:rPr lang="de-DE" dirty="0"/>
               <a:t>Textmasterformate durch Klicken bearbeiten</a:t>
             </a:r>
           </a:p>
           <a:p>
             <a:pPr lvl="1"/>
             <a:r>
-              <a:rPr lang="de-DE" dirty="0" smtClean="0"/>
+              <a:rPr lang="de-DE" dirty="0"/>
               <a:t>Zweite Ebene</a:t>
             </a:r>
           </a:p>
           <a:p>
             <a:pPr lvl="2"/>
             <a:r>
-              <a:rPr lang="de-DE" dirty="0" smtClean="0"/>
+              <a:rPr lang="de-DE" dirty="0"/>
               <a:t>Dritte Ebene</a:t>
             </a:r>
           </a:p>
           <a:p>
             <a:pPr lvl="3"/>
             <a:r>
-              <a:rPr lang="de-DE" dirty="0" smtClean="0"/>
+              <a:rPr lang="de-DE" dirty="0"/>
               <a:t>Vierte Ebene</a:t>
             </a:r>
           </a:p>
           <a:p>
             <a:pPr lvl="4"/>
             <a:r>
-              <a:rPr lang="de-DE" dirty="0" smtClean="0"/>
+              <a:rPr lang="de-DE" dirty="0"/>
               <a:t>Fünfte Ebene</a:t>
             </a:r>
             <a:endParaRPr lang="de-AT" dirty="0"/>
@@ -3687,7 +3690,7 @@
             <a:pPr eaLnBrk="1" hangingPunct="1">
               <a:defRPr/>
             </a:pPr>
-            <a:endParaRPr lang="de-AT" sz="3200" dirty="0" smtClean="0">
+            <a:endParaRPr lang="de-AT" sz="3200" dirty="0">
               <a:solidFill>
                 <a:schemeClr val="tx2"/>
               </a:solidFill>
@@ -3745,35 +3748,35 @@
           <a:p>
             <a:pPr lvl="0"/>
             <a:r>
-              <a:rPr lang="de-DE" dirty="0" smtClean="0"/>
+              <a:rPr lang="de-DE" dirty="0"/>
               <a:t>Textmasterformate durch Klicken bearbeiten</a:t>
             </a:r>
           </a:p>
           <a:p>
             <a:pPr lvl="1"/>
             <a:r>
-              <a:rPr lang="de-DE" dirty="0" smtClean="0"/>
+              <a:rPr lang="de-DE" dirty="0"/>
               <a:t>Zweite Ebene</a:t>
             </a:r>
           </a:p>
           <a:p>
             <a:pPr lvl="2"/>
             <a:r>
-              <a:rPr lang="de-DE" dirty="0" smtClean="0"/>
+              <a:rPr lang="de-DE" dirty="0"/>
               <a:t>Dritte Ebene</a:t>
             </a:r>
           </a:p>
           <a:p>
             <a:pPr lvl="3"/>
             <a:r>
-              <a:rPr lang="de-DE" dirty="0" smtClean="0"/>
+              <a:rPr lang="de-DE" dirty="0"/>
               <a:t>Vierte Ebene</a:t>
             </a:r>
           </a:p>
           <a:p>
             <a:pPr lvl="4"/>
             <a:r>
-              <a:rPr lang="de-DE" dirty="0" smtClean="0"/>
+              <a:rPr lang="de-DE" dirty="0"/>
               <a:t>Fünfte Ebene</a:t>
             </a:r>
             <a:endParaRPr lang="de-AT" dirty="0"/>
@@ -3835,7 +3838,7 @@
           </a:lstStyle>
           <a:p>
             <a:r>
-              <a:rPr lang="en-US" dirty="0" smtClean="0"/>
+              <a:rPr lang="en-US" dirty="0"/>
               <a:t>Titelmasterformat durch Klicken bearbeiten</a:t>
             </a:r>
             <a:endParaRPr lang="de-AT" dirty="0"/>
@@ -3902,38 +3905,38 @@
           <a:p>
             <a:pPr lvl="0"/>
             <a:r>
-              <a:rPr lang="en-US" dirty="0" smtClean="0"/>
+              <a:rPr lang="en-US" dirty="0"/>
               <a:t>Textmasterformate durch Klicken bearbeiten</a:t>
             </a:r>
           </a:p>
           <a:p>
             <a:pPr lvl="1"/>
             <a:r>
-              <a:rPr lang="en-US" dirty="0" smtClean="0"/>
+              <a:rPr lang="en-US" dirty="0"/>
               <a:t>Zweite Ebene</a:t>
             </a:r>
           </a:p>
           <a:p>
             <a:pPr lvl="2"/>
             <a:r>
-              <a:rPr lang="en-US" dirty="0" smtClean="0"/>
+              <a:rPr lang="en-US" dirty="0"/>
               <a:t>Dritte Ebene</a:t>
             </a:r>
           </a:p>
           <a:p>
             <a:pPr lvl="3"/>
             <a:r>
-              <a:rPr lang="en-US" dirty="0" smtClean="0"/>
+              <a:rPr lang="en-US" dirty="0"/>
               <a:t>Vierte Ebene</a:t>
             </a:r>
           </a:p>
           <a:p>
             <a:pPr lvl="4"/>
             <a:r>
-              <a:rPr lang="en-US" dirty="0" smtClean="0"/>
+              <a:rPr lang="en-US" dirty="0"/>
               <a:t>Fünfte Ebene</a:t>
             </a:r>
-            <a:endParaRPr lang="de-DE" dirty="0" smtClean="0"/>
+            <a:endParaRPr lang="de-DE" dirty="0"/>
           </a:p>
         </p:txBody>
       </p:sp>
@@ -3987,7 +3990,7 @@
           </a:lstStyle>
           <a:p>
             <a:r>
-              <a:rPr lang="en-US" dirty="0" smtClean="0"/>
+              <a:rPr lang="en-US" dirty="0"/>
               <a:t>Titelmasterformat durch Klicken bearbeiten</a:t>
             </a:r>
             <a:endParaRPr lang="de-AT" dirty="0"/>
@@ -4026,28 +4029,28 @@
           <a:p>
             <a:pPr lvl="0"/>
             <a:r>
-              <a:rPr lang="en-US" dirty="0" smtClean="0"/>
+              <a:rPr lang="en-US" dirty="0"/>
               <a:t>Textmasterformate durch Klicken bearbeiten</a:t>
             </a:r>
           </a:p>
           <a:p>
             <a:pPr lvl="1"/>
             <a:r>
-              <a:rPr lang="en-US" dirty="0" smtClean="0"/>
+              <a:rPr lang="en-US" dirty="0"/>
               <a:t>Zweite Ebene</a:t>
             </a:r>
           </a:p>
           <a:p>
             <a:pPr lvl="2"/>
             <a:r>
-              <a:rPr lang="en-US" dirty="0" smtClean="0"/>
+              <a:rPr lang="en-US" dirty="0"/>
               <a:t>Dritte Ebene</a:t>
             </a:r>
           </a:p>
           <a:p>
             <a:pPr lvl="3"/>
             <a:r>
-              <a:rPr lang="en-US" dirty="0" smtClean="0"/>
+              <a:rPr lang="en-US" dirty="0"/>
               <a:t>Vierte Ebene</a:t>
             </a:r>
           </a:p>
@@ -4103,7 +4106,7 @@
           </a:lstStyle>
           <a:p>
             <a:r>
-              <a:rPr lang="en-US" dirty="0" smtClean="0"/>
+              <a:rPr lang="en-US" dirty="0"/>
               <a:t>Titelmasterformat durch Klicken bearbeiten</a:t>
             </a:r>
             <a:endParaRPr lang="de-AT" dirty="0"/>
@@ -4309,7 +4312,7 @@
           <a:lstStyle/>
           <a:p>
             <a:r>
-              <a:rPr lang="de-DE" smtClean="0"/>
+              <a:rPr lang="de-DE"/>
               <a:t>Titelmasterformat durch Klicken bearbeiten</a:t>
             </a:r>
             <a:endParaRPr lang="de-AT"/>
@@ -4377,7 +4380,7 @@
           </a:lstStyle>
           <a:p>
             <a:r>
-              <a:rPr lang="de-DE" smtClean="0"/>
+              <a:rPr lang="de-DE"/>
               <a:t>Formatvorlage des Untertitelmasters durch Klicken bearbeiten</a:t>
             </a:r>
             <a:endParaRPr lang="de-AT"/>
@@ -4441,7 +4444,7 @@
           </a:lstStyle>
           <a:p>
             <a:r>
-              <a:rPr lang="de-DE" dirty="0" smtClean="0"/>
+              <a:rPr lang="de-DE" dirty="0"/>
               <a:t>Titelmasterformat durch Klicken bearbeiten</a:t>
             </a:r>
             <a:endParaRPr lang="de-AT" dirty="0"/>
@@ -4508,7 +4511,7 @@
           </a:lstStyle>
           <a:p>
             <a:r>
-              <a:rPr lang="de-DE" dirty="0" smtClean="0"/>
+              <a:rPr lang="de-DE" dirty="0"/>
               <a:t>Formatvorlage des Untertitelmasters durch Klicken bearbeiten</a:t>
             </a:r>
             <a:endParaRPr lang="de-AT" dirty="0"/>
@@ -4658,7 +4661,7 @@
           </a:lstStyle>
           <a:p>
             <a:r>
-              <a:rPr lang="de-DE" dirty="0" smtClean="0"/>
+              <a:rPr lang="de-DE" dirty="0"/>
               <a:t>Titelmasterformat durch Klicken bearbeiten</a:t>
             </a:r>
             <a:endParaRPr lang="de-AT" dirty="0"/>
@@ -4708,35 +4711,35 @@
           <a:p>
             <a:pPr lvl="0"/>
             <a:r>
-              <a:rPr lang="de-DE" dirty="0" smtClean="0"/>
+              <a:rPr lang="de-DE" dirty="0"/>
               <a:t>Textmasterformate durch Klicken bearbeiten</a:t>
             </a:r>
           </a:p>
           <a:p>
             <a:pPr lvl="1"/>
             <a:r>
-              <a:rPr lang="de-DE" dirty="0" smtClean="0"/>
+              <a:rPr lang="de-DE" dirty="0"/>
               <a:t>Zweite Ebene</a:t>
             </a:r>
           </a:p>
           <a:p>
             <a:pPr lvl="2"/>
             <a:r>
-              <a:rPr lang="de-DE" dirty="0" smtClean="0"/>
+              <a:rPr lang="de-DE" dirty="0"/>
               <a:t>Dritte Ebene</a:t>
             </a:r>
           </a:p>
           <a:p>
             <a:pPr lvl="3"/>
             <a:r>
-              <a:rPr lang="de-DE" dirty="0" smtClean="0"/>
+              <a:rPr lang="de-DE" dirty="0"/>
               <a:t>Vierte Ebene</a:t>
             </a:r>
           </a:p>
           <a:p>
             <a:pPr lvl="4"/>
             <a:r>
-              <a:rPr lang="de-DE" dirty="0" smtClean="0"/>
+              <a:rPr lang="de-DE" dirty="0"/>
               <a:t>Fünfte Ebene</a:t>
             </a:r>
             <a:endParaRPr lang="de-AT" dirty="0"/>
@@ -5027,7 +5030,7 @@
           <a:lstStyle/>
           <a:p>
             <a:r>
-              <a:rPr lang="de-DE" dirty="0" smtClean="0"/>
+              <a:rPr lang="de-DE" dirty="0"/>
               <a:t>Masterfolie</a:t>
             </a:r>
             <a:endParaRPr lang="de-AT" dirty="0"/>
@@ -5194,7 +5197,7 @@
               <a:defRPr/>
             </a:pPr>
             <a:r>
-              <a:rPr lang="de-DE" sz="1000" kern="1200" dirty="0" smtClean="0">
+              <a:rPr lang="de-DE" sz="1000" kern="1200" dirty="0">
                 <a:solidFill>
                   <a:schemeClr val="bg1">
                     <a:lumMod val="50000"/>
@@ -5207,7 +5210,7 @@
               <a:t>I_POS 2015/16 </a:t>
             </a:r>
             <a:r>
-              <a:rPr lang="de-DE" sz="1000" kern="1200" dirty="0" smtClean="0">
+              <a:rPr lang="de-DE" sz="1000" kern="1200" dirty="0">
                 <a:solidFill>
                   <a:schemeClr val="bg1">
                     <a:lumMod val="50000"/>
@@ -5221,7 +5224,7 @@
               <a:t> Methoden  </a:t>
             </a:r>
             <a:r>
-              <a:rPr lang="de-DE" sz="1000" kern="1200" dirty="0" smtClean="0">
+              <a:rPr lang="de-DE" sz="1000" kern="1200" dirty="0">
                 <a:solidFill>
                   <a:schemeClr val="bg1">
                     <a:lumMod val="50000"/>
@@ -5280,13 +5283,6 @@
     <p:sldLayoutId id="2147483913" r:id="rId6"/>
     <p:sldLayoutId id="2147483914" r:id="rId7"/>
   </p:sldLayoutIdLst>
-  <p:timing>
-    <p:tnLst>
-      <p:par>
-        <p:cTn id="1" dur="indefinite" restart="never" nodeType="tmRoot"/>
-      </p:par>
-    </p:tnLst>
-  </p:timing>
   <p:hf hdr="0" ftr="0" dt="0"/>
   <p:txStyles>
     <p:titleStyle>
@@ -5904,7 +5900,7 @@
                 <a:pPr>
                   <a:defRPr/>
                 </a:pPr>
-                <a:endParaRPr lang="de-AT" smtClean="0">
+                <a:endParaRPr lang="de-AT">
                   <a:latin typeface="Calibri" panose="020F0502020204030204" pitchFamily="34" charset="0"/>
                 </a:endParaRPr>
               </a:p>
@@ -6117,7 +6113,7 @@
               <a:pPr>
                 <a:defRPr/>
               </a:pPr>
-              <a:endParaRPr lang="de-AT" smtClean="0">
+              <a:endParaRPr lang="de-AT">
                 <a:latin typeface="Calibri" panose="020F0502020204030204" pitchFamily="34" charset="0"/>
               </a:endParaRPr>
             </a:p>
@@ -6279,7 +6275,7 @@
               <a:pPr>
                 <a:defRPr/>
               </a:pPr>
-              <a:endParaRPr lang="de-AT" smtClean="0">
+              <a:endParaRPr lang="de-AT">
                 <a:latin typeface="Calibri" panose="020F0502020204030204" pitchFamily="34" charset="0"/>
               </a:endParaRPr>
             </a:p>
@@ -6435,7 +6431,7 @@
               <a:pPr>
                 <a:defRPr/>
               </a:pPr>
-              <a:endParaRPr lang="de-AT" smtClean="0">
+              <a:endParaRPr lang="de-AT">
                 <a:latin typeface="Calibri" panose="020F0502020204030204" pitchFamily="34" charset="0"/>
               </a:endParaRPr>
             </a:p>
@@ -6494,7 +6490,7 @@
           <a:p>
             <a:pPr lvl="0"/>
             <a:r>
-              <a:rPr lang="de-DE" altLang="de-DE" smtClean="0"/>
+              <a:rPr lang="de-DE" altLang="de-DE"/>
               <a:t>Klicken Sie, um das Titelformat zu bearbeiten</a:t>
             </a:r>
           </a:p>
@@ -6552,35 +6548,35 @@
           <a:p>
             <a:pPr lvl="0"/>
             <a:r>
-              <a:rPr lang="de-DE" altLang="de-DE" smtClean="0"/>
+              <a:rPr lang="de-DE" altLang="de-DE"/>
               <a:t>Klicken Sie, um die Formate des Vorlagentextes zu bearbeiten</a:t>
             </a:r>
           </a:p>
           <a:p>
             <a:pPr lvl="1"/>
             <a:r>
-              <a:rPr lang="de-DE" altLang="de-DE" smtClean="0"/>
+              <a:rPr lang="de-DE" altLang="de-DE"/>
               <a:t>Zweite Ebene</a:t>
             </a:r>
           </a:p>
           <a:p>
             <a:pPr lvl="2"/>
             <a:r>
-              <a:rPr lang="de-DE" altLang="de-DE" smtClean="0"/>
+              <a:rPr lang="de-DE" altLang="de-DE"/>
               <a:t>Dritte Ebene</a:t>
             </a:r>
           </a:p>
           <a:p>
             <a:pPr lvl="3"/>
             <a:r>
-              <a:rPr lang="de-DE" altLang="de-DE" smtClean="0"/>
+              <a:rPr lang="de-DE" altLang="de-DE"/>
               <a:t>Vierte Ebene</a:t>
             </a:r>
           </a:p>
           <a:p>
             <a:pPr lvl="4"/>
             <a:r>
-              <a:rPr lang="de-DE" altLang="de-DE" smtClean="0"/>
+              <a:rPr lang="de-DE" altLang="de-DE"/>
               <a:t>Fünfte Ebene</a:t>
             </a:r>
           </a:p>
@@ -7205,7 +7201,7 @@
               <a:defRPr/>
             </a:pPr>
             <a:r>
-              <a:rPr lang="de-AT" smtClean="0"/>
+              <a:rPr lang="de-AT"/>
               <a:t>Parameterlose Methoden</a:t>
             </a:r>
           </a:p>
@@ -7383,7 +7379,7 @@
         <p:spPr bwMode="auto">
           <a:xfrm>
             <a:off x="903288" y="1808163"/>
-            <a:ext cx="5040312" cy="4032250"/>
+            <a:ext cx="5040312" cy="4031873"/>
           </a:xfrm>
           <a:prstGeom prst="rect">
             <a:avLst/>
@@ -7570,7 +7566,7 @@
           </a:lstStyle>
           <a:p>
             <a:r>
-              <a:rPr lang="de-AT" altLang="de-DE" sz="1600">
+              <a:rPr lang="de-AT" altLang="de-DE" sz="1600" dirty="0" err="1">
                 <a:solidFill>
                   <a:schemeClr val="accent2"/>
                 </a:solidFill>
@@ -7578,45 +7574,78 @@
               </a:rPr>
               <a:t>class</a:t>
             </a:r>
+            <a:r>
+              <a:rPr lang="de-AT" altLang="de-DE" sz="1600" dirty="0">
+                <a:latin typeface="Calibri" panose="020F0502020204030204" pitchFamily="34" charset="0"/>
+              </a:rPr>
+              <a:t> Sample </a:t>
+            </a:r>
+          </a:p>
+          <a:p>
             <a:r>
               <a:rPr lang="de-AT" altLang="de-DE" sz="1600">
                 <a:latin typeface="Calibri" panose="020F0502020204030204" pitchFamily="34" charset="0"/>
               </a:rPr>
-              <a:t> Sample {</a:t>
-            </a:r>
-          </a:p>
-          <a:p>
-            <a:endParaRPr lang="de-AT" altLang="de-DE" sz="1600">
+              <a:t>{</a:t>
+            </a:r>
+            <a:endParaRPr lang="de-AT" altLang="de-DE" sz="1600" dirty="0">
               <a:latin typeface="Calibri" panose="020F0502020204030204" pitchFamily="34" charset="0"/>
             </a:endParaRPr>
           </a:p>
           <a:p>
             <a:r>
-              <a:rPr lang="de-AT" altLang="de-DE" sz="1600">
+              <a:rPr lang="de-AT" altLang="de-DE" sz="1600" dirty="0">
                 <a:latin typeface="Calibri" panose="020F0502020204030204" pitchFamily="34" charset="0"/>
               </a:rPr>
               <a:t>	</a:t>
             </a:r>
             <a:r>
-              <a:rPr lang="de-AT" altLang="de-DE" sz="1600">
+              <a:rPr lang="de-AT" altLang="de-DE" sz="1600" dirty="0" err="1">
                 <a:solidFill>
                   <a:schemeClr val="accent2"/>
                 </a:solidFill>
                 <a:latin typeface="Calibri" panose="020F0502020204030204" pitchFamily="34" charset="0"/>
               </a:rPr>
-              <a:t>static void </a:t>
-            </a:r>
-            <a:r>
-              <a:rPr lang="de-AT" altLang="de-DE" sz="1600" b="1">
+              <a:t>static</a:t>
+            </a:r>
+            <a:r>
+              <a:rPr lang="de-AT" altLang="de-DE" sz="1600" dirty="0">
                 <a:solidFill>
                   <a:schemeClr val="accent2"/>
                 </a:solidFill>
                 <a:latin typeface="Calibri" panose="020F0502020204030204" pitchFamily="34" charset="0"/>
               </a:rPr>
+              <a:t> </a:t>
+            </a:r>
+            <a:r>
+              <a:rPr lang="de-AT" altLang="de-DE" sz="1600" dirty="0" err="1">
+                <a:solidFill>
+                  <a:schemeClr val="accent2"/>
+                </a:solidFill>
+                <a:latin typeface="Calibri" panose="020F0502020204030204" pitchFamily="34" charset="0"/>
+              </a:rPr>
+              <a:t>void</a:t>
+            </a:r>
+            <a:r>
+              <a:rPr lang="de-AT" altLang="de-DE" sz="1600" dirty="0">
+                <a:solidFill>
+                  <a:schemeClr val="accent2"/>
+                </a:solidFill>
+                <a:latin typeface="Calibri" panose="020F0502020204030204" pitchFamily="34" charset="0"/>
+              </a:rPr>
+              <a:t> </a:t>
+            </a:r>
+            <a:r>
+              <a:rPr lang="de-AT" altLang="de-DE" sz="1600" b="1" dirty="0" err="1">
+                <a:solidFill>
+                  <a:schemeClr val="accent2"/>
+                </a:solidFill>
+                <a:latin typeface="Calibri" panose="020F0502020204030204" pitchFamily="34" charset="0"/>
+              </a:rPr>
               <a:t>PrintHeader</a:t>
             </a:r>
             <a:r>
-              <a:rPr lang="de-AT" altLang="de-DE" sz="1600">
+              <a:rPr lang="de-AT" altLang="de-DE" sz="1600" dirty="0">
                 <a:solidFill>
                   <a:schemeClr val="accent2"/>
                 </a:solidFill>
@@ -7625,7 +7654,7 @@
               <a:t>()		          </a:t>
             </a:r>
             <a:r>
-              <a:rPr lang="de-AT" altLang="de-DE" sz="1600">
+              <a:rPr lang="de-AT" altLang="de-DE" sz="1600" dirty="0">
                 <a:solidFill>
                   <a:srgbClr val="00B050"/>
                 </a:solidFill>
@@ -7633,19 +7662,31 @@
               </a:rPr>
               <a:t>// Methodenkopf</a:t>
             </a:r>
-            <a:endParaRPr lang="de-AT" altLang="de-DE" sz="1600">
+            <a:endParaRPr lang="de-AT" altLang="de-DE" sz="1600" dirty="0">
               <a:latin typeface="Calibri" panose="020F0502020204030204" pitchFamily="34" charset="0"/>
             </a:endParaRPr>
           </a:p>
           <a:p>
             <a:r>
-              <a:rPr lang="de-AT" altLang="de-DE" sz="1600">
+              <a:rPr lang="de-AT" altLang="de-DE" sz="1600" dirty="0">
                 <a:latin typeface="Calibri" panose="020F0502020204030204" pitchFamily="34" charset="0"/>
               </a:rPr>
-              <a:t>	{						    Console.WriteLine("Artikelliste");  </a:t>
-            </a:r>
-            <a:r>
-              <a:rPr lang="de-AT" altLang="de-DE" sz="1600">
+              <a:t>	{						    </a:t>
+            </a:r>
+            <a:r>
+              <a:rPr lang="de-AT" altLang="de-DE" sz="1600" dirty="0" err="1">
+                <a:latin typeface="Calibri" panose="020F0502020204030204" pitchFamily="34" charset="0"/>
+              </a:rPr>
+              <a:t>Console.WriteLine</a:t>
+            </a:r>
+            <a:r>
+              <a:rPr lang="de-AT" altLang="de-DE" sz="1600" dirty="0">
+                <a:latin typeface="Calibri" panose="020F0502020204030204" pitchFamily="34" charset="0"/>
+              </a:rPr>
+              <a:t>("Artikelliste");  </a:t>
+            </a:r>
+            <a:r>
+              <a:rPr lang="de-AT" altLang="de-DE" sz="1600" dirty="0">
                 <a:solidFill>
                   <a:srgbClr val="00B050"/>
                 </a:solidFill>
@@ -7656,34 +7697,46 @@
           </a:p>
           <a:p>
             <a:r>
-              <a:rPr lang="de-AT" altLang="de-DE" sz="1600">
+              <a:rPr lang="de-AT" altLang="de-DE" sz="1600" dirty="0">
                 <a:latin typeface="Calibri" panose="020F0502020204030204" pitchFamily="34" charset="0"/>
               </a:rPr>
-              <a:t>		Console.WriteLine("------------");</a:t>
-            </a:r>
-          </a:p>
-          <a:p>
-            <a:r>
-              <a:rPr lang="de-AT" altLang="de-DE" sz="1600">
+              <a:t>		</a:t>
+            </a:r>
+            <a:r>
+              <a:rPr lang="de-AT" altLang="de-DE" sz="1600" dirty="0" err="1">
                 <a:latin typeface="Calibri" panose="020F0502020204030204" pitchFamily="34" charset="0"/>
               </a:rPr>
+              <a:t>Console.WriteLine</a:t>
+            </a:r>
+            <a:r>
+              <a:rPr lang="de-AT" altLang="de-DE" sz="1600" dirty="0">
+                <a:latin typeface="Calibri" panose="020F0502020204030204" pitchFamily="34" charset="0"/>
+              </a:rPr>
+              <a:t>("------------");</a:t>
+            </a:r>
+          </a:p>
+          <a:p>
+            <a:r>
+              <a:rPr lang="de-AT" altLang="de-DE" sz="1600" dirty="0">
+                <a:latin typeface="Calibri" panose="020F0502020204030204" pitchFamily="34" charset="0"/>
+              </a:rPr>
               <a:t>	}</a:t>
             </a:r>
           </a:p>
           <a:p>
-            <a:endParaRPr lang="de-AT" altLang="de-DE" sz="1600">
+            <a:endParaRPr lang="de-AT" altLang="de-DE" sz="1600" dirty="0">
               <a:latin typeface="Calibri" panose="020F0502020204030204" pitchFamily="34" charset="0"/>
             </a:endParaRPr>
           </a:p>
           <a:p>
             <a:r>
-              <a:rPr lang="de-AT" altLang="de-DE" sz="1600">
+              <a:rPr lang="de-AT" altLang="de-DE" sz="1600" dirty="0">
                 <a:latin typeface="Calibri" panose="020F0502020204030204" pitchFamily="34" charset="0"/>
               </a:rPr>
               <a:t>	</a:t>
             </a:r>
             <a:r>
-              <a:rPr lang="de-AT" altLang="de-DE" sz="1600">
+              <a:rPr lang="de-AT" altLang="de-DE" sz="1600" dirty="0" err="1">
                 <a:solidFill>
                   <a:schemeClr val="accent2"/>
                 </a:solidFill>
@@ -7692,13 +7745,13 @@
               <a:t>static</a:t>
             </a:r>
             <a:r>
-              <a:rPr lang="de-AT" altLang="de-DE" sz="1600">
+              <a:rPr lang="de-AT" altLang="de-DE" sz="1600" dirty="0">
                 <a:latin typeface="Calibri" panose="020F0502020204030204" pitchFamily="34" charset="0"/>
               </a:rPr>
               <a:t> </a:t>
             </a:r>
             <a:r>
-              <a:rPr lang="de-AT" altLang="de-DE" sz="1600">
+              <a:rPr lang="de-AT" altLang="de-DE" sz="1600" dirty="0" err="1">
                 <a:solidFill>
                   <a:schemeClr val="accent2"/>
                 </a:solidFill>
@@ -7707,44 +7760,65 @@
               <a:t>void</a:t>
             </a:r>
             <a:r>
-              <a:rPr lang="de-AT" altLang="de-DE" sz="1600">
+              <a:rPr lang="de-AT" altLang="de-DE" sz="1600" dirty="0">
                 <a:latin typeface="Calibri" panose="020F0502020204030204" pitchFamily="34" charset="0"/>
               </a:rPr>
-              <a:t> Main (String[] args) </a:t>
-            </a:r>
-          </a:p>
-          <a:p>
-            <a:r>
-              <a:rPr lang="de-AT" altLang="de-DE" sz="1600">
+              <a:t> Main (String[] </a:t>
+            </a:r>
+            <a:r>
+              <a:rPr lang="de-AT" altLang="de-DE" sz="1600" dirty="0" err="1">
                 <a:latin typeface="Calibri" panose="020F0502020204030204" pitchFamily="34" charset="0"/>
               </a:rPr>
+              <a:t>args</a:t>
+            </a:r>
+            <a:r>
+              <a:rPr lang="de-AT" altLang="de-DE" sz="1600" dirty="0">
+                <a:latin typeface="Calibri" panose="020F0502020204030204" pitchFamily="34" charset="0"/>
+              </a:rPr>
+              <a:t>) </a:t>
+            </a:r>
+          </a:p>
+          <a:p>
+            <a:r>
+              <a:rPr lang="de-AT" altLang="de-DE" sz="1600" dirty="0">
+                <a:latin typeface="Calibri" panose="020F0502020204030204" pitchFamily="34" charset="0"/>
+              </a:rPr>
               <a:t>	{</a:t>
             </a:r>
           </a:p>
           <a:p>
             <a:r>
-              <a:rPr lang="de-AT" altLang="de-DE" sz="1600">
+              <a:rPr lang="de-AT" altLang="de-DE" sz="1600" dirty="0">
                 <a:latin typeface="Calibri" panose="020F0502020204030204" pitchFamily="34" charset="0"/>
               </a:rPr>
               <a:t>		</a:t>
             </a:r>
             <a:r>
-              <a:rPr lang="de-AT" altLang="de-DE" sz="1600">
+              <a:rPr lang="de-AT" altLang="de-DE" sz="1600" dirty="0" err="1">
                 <a:solidFill>
                   <a:srgbClr val="FF0000"/>
                 </a:solidFill>
                 <a:latin typeface="Calibri" panose="020F0502020204030204" pitchFamily="34" charset="0"/>
               </a:rPr>
-              <a:t>PrintHeader();</a:t>
-            </a:r>
-            <a:r>
-              <a:rPr lang="de-AT" altLang="de-DE" sz="1600">
+              <a:t>PrintHeader</a:t>
+            </a:r>
+            <a:r>
+              <a:rPr lang="de-AT" altLang="de-DE" sz="1600" dirty="0">
+                <a:solidFill>
+                  <a:srgbClr val="FF0000"/>
+                </a:solidFill>
                 <a:latin typeface="Calibri" panose="020F0502020204030204" pitchFamily="34" charset="0"/>
               </a:rPr>
+              <a:t>();</a:t>
+            </a:r>
+            <a:r>
+              <a:rPr lang="de-AT" altLang="de-DE" sz="1600" dirty="0">
+                <a:latin typeface="Calibri" panose="020F0502020204030204" pitchFamily="34" charset="0"/>
+              </a:rPr>
               <a:t>	          </a:t>
             </a:r>
             <a:r>
-              <a:rPr lang="de-AT" altLang="de-DE" sz="1600">
+              <a:rPr lang="de-AT" altLang="de-DE" sz="1600" dirty="0">
                 <a:solidFill>
                   <a:srgbClr val="00B050"/>
                 </a:solidFill>
@@ -7755,7 +7829,7 @@
           </a:p>
           <a:p>
             <a:r>
-              <a:rPr lang="de-AT" altLang="de-DE" sz="1600">
+              <a:rPr lang="de-AT" altLang="de-DE" sz="1600" dirty="0">
                 <a:latin typeface="Calibri" panose="020F0502020204030204" pitchFamily="34" charset="0"/>
               </a:rPr>
               <a:t>		...</a:t>
@@ -7763,32 +7837,41 @@
           </a:p>
           <a:p>
             <a:r>
-              <a:rPr lang="de-AT" altLang="de-DE" sz="1600">
+              <a:rPr lang="de-AT" altLang="de-DE" sz="1600" dirty="0">
                 <a:latin typeface="Calibri" panose="020F0502020204030204" pitchFamily="34" charset="0"/>
               </a:rPr>
               <a:t>		</a:t>
             </a:r>
             <a:r>
-              <a:rPr lang="de-AT" altLang="de-DE" sz="1600">
+              <a:rPr lang="de-AT" altLang="de-DE" sz="1600" dirty="0" err="1">
                 <a:solidFill>
                   <a:srgbClr val="FF0000"/>
                 </a:solidFill>
                 <a:latin typeface="Calibri" panose="020F0502020204030204" pitchFamily="34" charset="0"/>
               </a:rPr>
-              <a:t>PrintHeader();</a:t>
-            </a:r>
-          </a:p>
-          <a:p>
-            <a:r>
-              <a:rPr lang="de-AT" altLang="de-DE" sz="1600">
+              <a:t>PrintHeader</a:t>
+            </a:r>
+            <a:r>
+              <a:rPr lang="de-AT" altLang="de-DE" sz="1600" dirty="0">
+                <a:solidFill>
+                  <a:srgbClr val="FF0000"/>
+                </a:solidFill>
                 <a:latin typeface="Calibri" panose="020F0502020204030204" pitchFamily="34" charset="0"/>
               </a:rPr>
+              <a:t>();</a:t>
+            </a:r>
+          </a:p>
+          <a:p>
+            <a:r>
+              <a:rPr lang="de-AT" altLang="de-DE" sz="1600" dirty="0">
+                <a:latin typeface="Calibri" panose="020F0502020204030204" pitchFamily="34" charset="0"/>
+              </a:rPr>
               <a:t>		...</a:t>
             </a:r>
           </a:p>
           <a:p>
             <a:r>
-              <a:rPr lang="de-AT" altLang="de-DE" sz="1600">
+              <a:rPr lang="de-AT" altLang="de-DE" sz="1600" dirty="0">
                 <a:latin typeface="Calibri" panose="020F0502020204030204" pitchFamily="34" charset="0"/>
               </a:rPr>
               <a:t>	}</a:t>
@@ -7796,7 +7879,7 @@
           </a:p>
           <a:p>
             <a:r>
-              <a:rPr lang="de-AT" altLang="de-DE" sz="1600">
+              <a:rPr lang="de-AT" altLang="de-DE" sz="1600" dirty="0">
                 <a:latin typeface="Calibri" panose="020F0502020204030204" pitchFamily="34" charset="0"/>
               </a:rPr>
               <a:t>}</a:t>
@@ -8187,13 +8270,6 @@
   <p:clrMapOvr>
     <a:masterClrMapping/>
   </p:clrMapOvr>
-  <p:timing>
-    <p:tnLst>
-      <p:par>
-        <p:cTn id="1" dur="indefinite" restart="never" nodeType="tmRoot"/>
-      </p:par>
-    </p:tnLst>
-  </p:timing>
 </p:sld>
 </file>
 
@@ -8233,7 +8309,7 @@
               <a:defRPr/>
             </a:pPr>
             <a:r>
-              <a:rPr lang="de-AT" smtClean="0"/>
+              <a:rPr lang="de-AT"/>
               <a:t>Beispiel zu Sichtbarkeitsregeln</a:t>
             </a:r>
           </a:p>
@@ -10581,13 +10657,6 @@
   <p:clrMapOvr>
     <a:masterClrMapping/>
   </p:clrMapOvr>
-  <p:timing>
-    <p:tnLst>
-      <p:par>
-        <p:cTn id="1" dur="indefinite" restart="never" nodeType="tmRoot"/>
-      </p:par>
-    </p:tnLst>
-  </p:timing>
 </p:sld>
 </file>
 
@@ -10627,7 +10696,7 @@
               <a:defRPr/>
             </a:pPr>
             <a:r>
-              <a:rPr lang="de-AT" smtClean="0"/>
+              <a:rPr lang="de-AT"/>
               <a:t>Lebensdauer von Variablen</a:t>
             </a:r>
           </a:p>
@@ -21144,7 +21213,7 @@
               <a:defRPr/>
             </a:pPr>
             <a:r>
-              <a:rPr lang="de-AT" smtClean="0"/>
+              <a:rPr lang="de-AT"/>
               <a:t>Lokalitätsprinzip</a:t>
             </a:r>
           </a:p>
@@ -21198,7 +21267,7 @@
               <a:buNone/>
             </a:pPr>
             <a:r>
-              <a:rPr lang="de-AT" altLang="de-DE" sz="2000" b="1" smtClean="0">
+              <a:rPr lang="de-AT" altLang="de-DE" sz="2000" b="1">
                 <a:solidFill>
                   <a:schemeClr val="accent2"/>
                 </a:solidFill>
@@ -21211,7 +21280,7 @@
               <a:buFont typeface="Times" panose="02020603050405020304" pitchFamily="18" charset="0"/>
               <a:buNone/>
             </a:pPr>
-            <a:endParaRPr lang="de-AT" altLang="de-DE" sz="2000" smtClean="0"/>
+            <a:endParaRPr lang="de-AT" altLang="de-DE" sz="2000"/>
           </a:p>
           <a:p>
             <a:pPr>
@@ -21219,7 +21288,7 @@
               <a:buNone/>
             </a:pPr>
             <a:r>
-              <a:rPr lang="de-AT" altLang="de-DE" sz="2000" b="1" smtClean="0"/>
+              <a:rPr lang="de-AT" altLang="de-DE" sz="2000" b="1"/>
               <a:t>Vorteile</a:t>
             </a:r>
           </a:p>
@@ -21230,22 +21299,18 @@
               </a:spcBef>
             </a:pPr>
             <a:r>
-              <a:rPr lang="de-AT" altLang="de-DE" sz="2000" smtClean="0">
+              <a:rPr lang="de-AT" altLang="de-DE" sz="2000">
                 <a:solidFill>
                   <a:schemeClr val="accent2"/>
                 </a:solidFill>
               </a:rPr>
               <a:t>Übersichtlichkeit</a:t>
             </a:r>
-            <a:r>
-              <a:rPr lang="de-AT" altLang="de-DE" sz="2000" smtClean="0"/>
-              <a:t/>
-            </a:r>
             <a:br>
-              <a:rPr lang="de-AT" altLang="de-DE" sz="2000" smtClean="0"/>
+              <a:rPr lang="de-AT" altLang="de-DE" sz="2000"/>
             </a:br>
             <a:r>
-              <a:rPr lang="de-AT" altLang="de-DE" sz="2000" smtClean="0"/>
+              <a:rPr lang="de-AT" altLang="de-DE" sz="2000"/>
               <a:t>Deklaration und Benutzung nahe beisammen</a:t>
             </a:r>
           </a:p>
@@ -21256,22 +21321,18 @@
               </a:spcBef>
             </a:pPr>
             <a:r>
-              <a:rPr lang="de-AT" altLang="de-DE" sz="2000" smtClean="0">
+              <a:rPr lang="de-AT" altLang="de-DE" sz="2000">
                 <a:solidFill>
                   <a:schemeClr val="accent2"/>
                 </a:solidFill>
               </a:rPr>
               <a:t>Sicherheit</a:t>
             </a:r>
-            <a:r>
-              <a:rPr lang="de-AT" altLang="de-DE" sz="2000" smtClean="0"/>
-              <a:t/>
-            </a:r>
             <a:br>
-              <a:rPr lang="de-AT" altLang="de-DE" sz="2000" smtClean="0"/>
+              <a:rPr lang="de-AT" altLang="de-DE" sz="2000"/>
             </a:br>
             <a:r>
-              <a:rPr lang="de-AT" altLang="de-DE" sz="2000" smtClean="0"/>
+              <a:rPr lang="de-AT" altLang="de-DE" sz="2000"/>
               <a:t>Lokale Variablen können nicht durch andere Methoden zerstört werden</a:t>
             </a:r>
           </a:p>
@@ -21282,22 +21343,18 @@
               </a:spcBef>
             </a:pPr>
             <a:r>
-              <a:rPr lang="de-AT" altLang="de-DE" sz="2000" smtClean="0">
+              <a:rPr lang="de-AT" altLang="de-DE" sz="2000">
                 <a:solidFill>
                   <a:schemeClr val="accent2"/>
                 </a:solidFill>
               </a:rPr>
               <a:t>Effizienz</a:t>
             </a:r>
-            <a:r>
-              <a:rPr lang="de-AT" altLang="de-DE" sz="2000" smtClean="0"/>
-              <a:t/>
-            </a:r>
             <a:br>
-              <a:rPr lang="de-AT" altLang="de-DE" sz="2000" smtClean="0"/>
+              <a:rPr lang="de-AT" altLang="de-DE" sz="2000"/>
             </a:br>
             <a:r>
-              <a:rPr lang="de-AT" altLang="de-DE" sz="2000" smtClean="0"/>
+              <a:rPr lang="de-AT" altLang="de-DE" sz="2000"/>
               <a:t>Zugriff auf lokale Variable ist oft schneller als auf statische Variable</a:t>
             </a:r>
           </a:p>
@@ -21308,13 +21365,6 @@
   <p:clrMapOvr>
     <a:masterClrMapping/>
   </p:clrMapOvr>
-  <p:timing>
-    <p:tnLst>
-      <p:par>
-        <p:cTn id="1" dur="indefinite" restart="never" nodeType="tmRoot"/>
-      </p:par>
-    </p:tnLst>
-  </p:timing>
 </p:sld>
 </file>
 
@@ -21354,7 +21404,7 @@
               <a:defRPr/>
             </a:pPr>
             <a:r>
-              <a:rPr lang="de-AT" smtClean="0"/>
+              <a:rPr lang="de-AT"/>
               <a:t>Überladen von Methoden</a:t>
             </a:r>
           </a:p>
@@ -22551,13 +22601,6 @@
   <p:clrMapOvr>
     <a:masterClrMapping/>
   </p:clrMapOvr>
-  <p:timing>
-    <p:tnLst>
-      <p:par>
-        <p:cTn id="1" dur="indefinite" restart="never" nodeType="tmRoot"/>
-      </p:par>
-    </p:tnLst>
-  </p:timing>
 </p:sld>
 </file>
 
@@ -22597,7 +22640,7 @@
               <a:defRPr/>
             </a:pPr>
             <a:r>
-              <a:rPr lang="de-AT" smtClean="0"/>
+              <a:rPr lang="de-AT"/>
               <a:t>Beispiele</a:t>
             </a:r>
           </a:p>
@@ -23549,13 +23592,6 @@
   <p:clrMapOvr>
     <a:masterClrMapping/>
   </p:clrMapOvr>
-  <p:timing>
-    <p:tnLst>
-      <p:par>
-        <p:cTn id="1" dur="indefinite" restart="never" nodeType="tmRoot"/>
-      </p:par>
-    </p:tnLst>
-  </p:timing>
 </p:sld>
 </file>
 
@@ -23595,7 +23631,7 @@
               <a:defRPr/>
             </a:pPr>
             <a:r>
-              <a:rPr lang="de-AT" smtClean="0"/>
+              <a:rPr lang="de-AT"/>
               <a:t>Beispiele</a:t>
             </a:r>
           </a:p>
@@ -25113,13 +25149,6 @@
   <p:clrMapOvr>
     <a:masterClrMapping/>
   </p:clrMapOvr>
-  <p:timing>
-    <p:tnLst>
-      <p:par>
-        <p:cTn id="1" dur="indefinite" restart="never" nodeType="tmRoot"/>
-      </p:par>
-    </p:tnLst>
-  </p:timing>
 </p:sld>
 </file>
 
@@ -25159,7 +25188,7 @@
               <a:defRPr/>
             </a:pPr>
             <a:r>
-              <a:rPr lang="de-AT" smtClean="0"/>
+              <a:rPr lang="de-AT"/>
               <a:t>Wie funktioniert ein Methodenaufruf?</a:t>
             </a:r>
           </a:p>
@@ -25338,7 +25367,7 @@
               <a:defRPr/>
             </a:pPr>
             <a:r>
-              <a:rPr lang="de-AT" sz="1600" dirty="0" err="1" smtClean="0">
+              <a:rPr lang="de-AT" sz="1600" dirty="0" err="1">
                 <a:solidFill>
                   <a:schemeClr val="accent2"/>
                 </a:solidFill>
@@ -25347,13 +25376,13 @@
               <a:t>static</a:t>
             </a:r>
             <a:r>
-              <a:rPr lang="de-AT" sz="1600" dirty="0" smtClean="0">
+              <a:rPr lang="de-AT" sz="1600" dirty="0">
                 <a:latin typeface="Calibri" pitchFamily="34" charset="0"/>
               </a:rPr>
               <a:t> </a:t>
             </a:r>
             <a:r>
-              <a:rPr lang="de-AT" sz="1600" dirty="0" err="1" smtClean="0">
+              <a:rPr lang="de-AT" sz="1600" dirty="0" err="1">
                 <a:solidFill>
                   <a:schemeClr val="accent2"/>
                 </a:solidFill>
@@ -25362,19 +25391,19 @@
               <a:t>void</a:t>
             </a:r>
             <a:r>
-              <a:rPr lang="de-AT" sz="1600" dirty="0" smtClean="0">
+              <a:rPr lang="de-AT" sz="1600" dirty="0">
                 <a:latin typeface="Calibri" pitchFamily="34" charset="0"/>
               </a:rPr>
               <a:t> </a:t>
             </a:r>
             <a:r>
-              <a:rPr lang="de-AT" sz="1600" b="1" dirty="0" smtClean="0">
+              <a:rPr lang="de-AT" sz="1600" b="1" dirty="0">
                 <a:latin typeface="Calibri" pitchFamily="34" charset="0"/>
               </a:rPr>
               <a:t>P</a:t>
             </a:r>
             <a:r>
-              <a:rPr lang="de-AT" sz="1600" dirty="0" smtClean="0">
+              <a:rPr lang="de-AT" sz="1600" dirty="0">
                 <a:latin typeface="Calibri" pitchFamily="34" charset="0"/>
               </a:rPr>
               <a:t>() </a:t>
@@ -25385,7 +25414,7 @@
               <a:defRPr/>
             </a:pPr>
             <a:r>
-              <a:rPr lang="de-AT" sz="1600" dirty="0" smtClean="0">
+              <a:rPr lang="de-AT" sz="1600" dirty="0">
                 <a:latin typeface="Calibri" pitchFamily="34" charset="0"/>
               </a:rPr>
               <a:t>{</a:t>
@@ -25396,7 +25425,7 @@
               <a:defRPr/>
             </a:pPr>
             <a:r>
-              <a:rPr lang="de-AT" sz="1600" dirty="0" smtClean="0">
+              <a:rPr lang="de-AT" sz="1600" dirty="0">
                 <a:latin typeface="Calibri" pitchFamily="34" charset="0"/>
               </a:rPr>
               <a:t>	...</a:t>
@@ -25407,7 +25436,7 @@
               <a:defRPr/>
             </a:pPr>
             <a:r>
-              <a:rPr lang="de-AT" sz="1600" dirty="0" smtClean="0">
+              <a:rPr lang="de-AT" sz="1600" dirty="0">
                 <a:latin typeface="Calibri" pitchFamily="34" charset="0"/>
               </a:rPr>
               <a:t>	Q();</a:t>
@@ -25418,7 +25447,7 @@
               <a:defRPr/>
             </a:pPr>
             <a:r>
-              <a:rPr lang="de-AT" sz="1600" dirty="0" smtClean="0">
+              <a:rPr lang="de-AT" sz="1600" dirty="0">
                 <a:latin typeface="Calibri" pitchFamily="34" charset="0"/>
               </a:rPr>
               <a:t>	...</a:t>
@@ -25429,7 +25458,7 @@
               <a:defRPr/>
             </a:pPr>
             <a:r>
-              <a:rPr lang="de-AT" sz="1600" dirty="0" smtClean="0">
+              <a:rPr lang="de-AT" sz="1600" dirty="0">
                 <a:latin typeface="Calibri" pitchFamily="34" charset="0"/>
               </a:rPr>
               <a:t>}</a:t>
@@ -25610,7 +25639,7 @@
               <a:defRPr/>
             </a:pPr>
             <a:r>
-              <a:rPr lang="de-AT" sz="1600" dirty="0" err="1" smtClean="0">
+              <a:rPr lang="de-AT" sz="1600" dirty="0" err="1">
                 <a:solidFill>
                   <a:schemeClr val="accent2"/>
                 </a:solidFill>
@@ -25619,13 +25648,13 @@
               <a:t>static</a:t>
             </a:r>
             <a:r>
-              <a:rPr lang="de-AT" sz="1600" dirty="0" smtClean="0">
+              <a:rPr lang="de-AT" sz="1600" dirty="0">
                 <a:latin typeface="Calibri" pitchFamily="34" charset="0"/>
               </a:rPr>
               <a:t> </a:t>
             </a:r>
             <a:r>
-              <a:rPr lang="de-AT" sz="1600" dirty="0" err="1" smtClean="0">
+              <a:rPr lang="de-AT" sz="1600" dirty="0" err="1">
                 <a:solidFill>
                   <a:schemeClr val="accent2"/>
                 </a:solidFill>
@@ -25634,19 +25663,19 @@
               <a:t>void</a:t>
             </a:r>
             <a:r>
-              <a:rPr lang="de-AT" sz="1600" dirty="0" smtClean="0">
+              <a:rPr lang="de-AT" sz="1600" dirty="0">
                 <a:latin typeface="Calibri" pitchFamily="34" charset="0"/>
               </a:rPr>
               <a:t> </a:t>
             </a:r>
             <a:r>
-              <a:rPr lang="de-AT" sz="1600" b="1" dirty="0" smtClean="0">
+              <a:rPr lang="de-AT" sz="1600" b="1" dirty="0">
                 <a:latin typeface="Calibri" pitchFamily="34" charset="0"/>
               </a:rPr>
               <a:t>Q</a:t>
             </a:r>
             <a:r>
-              <a:rPr lang="de-AT" sz="1600" dirty="0" smtClean="0">
+              <a:rPr lang="de-AT" sz="1600" dirty="0">
                 <a:latin typeface="Calibri" pitchFamily="34" charset="0"/>
               </a:rPr>
               <a:t>() </a:t>
@@ -25657,7 +25686,7 @@
               <a:defRPr/>
             </a:pPr>
             <a:r>
-              <a:rPr lang="de-AT" sz="1600" dirty="0" smtClean="0">
+              <a:rPr lang="de-AT" sz="1600" dirty="0">
                 <a:latin typeface="Calibri" pitchFamily="34" charset="0"/>
               </a:rPr>
               <a:t>{</a:t>
@@ -25668,7 +25697,7 @@
               <a:defRPr/>
             </a:pPr>
             <a:r>
-              <a:rPr lang="de-AT" sz="1600" dirty="0" smtClean="0">
+              <a:rPr lang="de-AT" sz="1600" dirty="0">
                 <a:latin typeface="Calibri" pitchFamily="34" charset="0"/>
               </a:rPr>
               <a:t>	...</a:t>
@@ -25679,7 +25708,7 @@
               <a:defRPr/>
             </a:pPr>
             <a:r>
-              <a:rPr lang="de-AT" sz="1600" dirty="0" smtClean="0">
+              <a:rPr lang="de-AT" sz="1600" dirty="0">
                 <a:latin typeface="Calibri" pitchFamily="34" charset="0"/>
               </a:rPr>
               <a:t>	R();</a:t>
@@ -25690,7 +25719,7 @@
               <a:defRPr/>
             </a:pPr>
             <a:r>
-              <a:rPr lang="de-AT" sz="1600" dirty="0" smtClean="0">
+              <a:rPr lang="de-AT" sz="1600" dirty="0">
                 <a:latin typeface="Calibri" pitchFamily="34" charset="0"/>
               </a:rPr>
               <a:t>	...</a:t>
@@ -25701,7 +25730,7 @@
               <a:defRPr/>
             </a:pPr>
             <a:r>
-              <a:rPr lang="de-AT" sz="1600" dirty="0" smtClean="0">
+              <a:rPr lang="de-AT" sz="1600" dirty="0">
                 <a:latin typeface="Calibri" pitchFamily="34" charset="0"/>
               </a:rPr>
               <a:t>}</a:t>
@@ -25882,7 +25911,7 @@
               <a:defRPr/>
             </a:pPr>
             <a:r>
-              <a:rPr lang="de-AT" sz="1600" dirty="0" err="1" smtClean="0">
+              <a:rPr lang="de-AT" sz="1600" dirty="0" err="1">
                 <a:solidFill>
                   <a:schemeClr val="accent2"/>
                 </a:solidFill>
@@ -25891,13 +25920,13 @@
               <a:t>static</a:t>
             </a:r>
             <a:r>
-              <a:rPr lang="de-AT" sz="1600" dirty="0" smtClean="0">
+              <a:rPr lang="de-AT" sz="1600" dirty="0">
                 <a:latin typeface="Calibri" pitchFamily="34" charset="0"/>
               </a:rPr>
               <a:t> </a:t>
             </a:r>
             <a:r>
-              <a:rPr lang="de-AT" sz="1600" dirty="0" err="1" smtClean="0">
+              <a:rPr lang="de-AT" sz="1600" dirty="0" err="1">
                 <a:solidFill>
                   <a:schemeClr val="accent2"/>
                 </a:solidFill>
@@ -25906,19 +25935,19 @@
               <a:t>void</a:t>
             </a:r>
             <a:r>
-              <a:rPr lang="de-AT" sz="1600" dirty="0" smtClean="0">
+              <a:rPr lang="de-AT" sz="1600" dirty="0">
                 <a:latin typeface="Calibri" pitchFamily="34" charset="0"/>
               </a:rPr>
               <a:t> </a:t>
             </a:r>
             <a:r>
-              <a:rPr lang="de-AT" sz="1600" b="1" dirty="0" smtClean="0">
+              <a:rPr lang="de-AT" sz="1600" b="1" dirty="0">
                 <a:latin typeface="Calibri" pitchFamily="34" charset="0"/>
               </a:rPr>
               <a:t>R</a:t>
             </a:r>
             <a:r>
-              <a:rPr lang="de-AT" sz="1600" dirty="0" smtClean="0">
+              <a:rPr lang="de-AT" sz="1600" dirty="0">
                 <a:latin typeface="Calibri" pitchFamily="34" charset="0"/>
               </a:rPr>
               <a:t>() </a:t>
@@ -25929,7 +25958,7 @@
               <a:defRPr/>
             </a:pPr>
             <a:r>
-              <a:rPr lang="de-AT" sz="1600" dirty="0" smtClean="0">
+              <a:rPr lang="de-AT" sz="1600" dirty="0">
                 <a:latin typeface="Calibri" pitchFamily="34" charset="0"/>
               </a:rPr>
               <a:t>{</a:t>
@@ -25940,7 +25969,7 @@
               <a:defRPr/>
             </a:pPr>
             <a:r>
-              <a:rPr lang="de-AT" sz="1600" dirty="0" smtClean="0">
+              <a:rPr lang="de-AT" sz="1600" dirty="0">
                 <a:latin typeface="Calibri" pitchFamily="34" charset="0"/>
               </a:rPr>
               <a:t>	...</a:t>
@@ -25951,7 +25980,7 @@
               <a:defRPr/>
             </a:pPr>
             <a:r>
-              <a:rPr lang="de-AT" sz="1600" dirty="0" smtClean="0">
+              <a:rPr lang="de-AT" sz="1600" dirty="0">
                 <a:latin typeface="Calibri" pitchFamily="34" charset="0"/>
               </a:rPr>
               <a:t>	...</a:t>
@@ -25962,7 +25991,7 @@
               <a:defRPr/>
             </a:pPr>
             <a:r>
-              <a:rPr lang="de-AT" sz="1600" dirty="0" smtClean="0">
+              <a:rPr lang="de-AT" sz="1600" dirty="0">
                 <a:latin typeface="Calibri" pitchFamily="34" charset="0"/>
               </a:rPr>
               <a:t>	...</a:t>
@@ -25973,7 +26002,7 @@
               <a:defRPr/>
             </a:pPr>
             <a:r>
-              <a:rPr lang="de-AT" sz="1600" dirty="0" smtClean="0">
+              <a:rPr lang="de-AT" sz="1600" dirty="0">
                 <a:latin typeface="Calibri" pitchFamily="34" charset="0"/>
               </a:rPr>
               <a:t>}</a:t>
@@ -26542,13 +26571,6 @@
   <p:clrMapOvr>
     <a:masterClrMapping/>
   </p:clrMapOvr>
-  <p:timing>
-    <p:tnLst>
-      <p:par>
-        <p:cTn id="1" dur="indefinite" restart="never" nodeType="tmRoot"/>
-      </p:par>
-    </p:tnLst>
-  </p:timing>
 </p:sld>
 </file>
 
@@ -26832,31 +26854,31 @@
               <a:defRPr/>
             </a:pPr>
             <a:r>
-              <a:rPr lang="de-AT" dirty="0" smtClean="0"/>
+              <a:rPr lang="de-AT" dirty="0"/>
               <a:t>Parameter (Wertparameter -&gt; </a:t>
             </a:r>
             <a:r>
-              <a:rPr lang="de-AT" dirty="0" err="1" smtClean="0"/>
+              <a:rPr lang="de-AT" dirty="0" err="1"/>
               <a:t>call</a:t>
             </a:r>
             <a:r>
-              <a:rPr lang="de-AT" dirty="0" smtClean="0"/>
+              <a:rPr lang="de-AT" dirty="0"/>
               <a:t> </a:t>
             </a:r>
             <a:r>
-              <a:rPr lang="de-AT" dirty="0" err="1" smtClean="0"/>
+              <a:rPr lang="de-AT" dirty="0" err="1"/>
               <a:t>by</a:t>
             </a:r>
             <a:r>
-              <a:rPr lang="de-AT" dirty="0" smtClean="0"/>
+              <a:rPr lang="de-AT" dirty="0"/>
               <a:t> </a:t>
             </a:r>
             <a:r>
-              <a:rPr lang="de-AT" dirty="0" err="1" smtClean="0"/>
+              <a:rPr lang="de-AT" dirty="0" err="1"/>
               <a:t>value</a:t>
             </a:r>
             <a:r>
-              <a:rPr lang="de-AT" dirty="0" smtClean="0"/>
+              <a:rPr lang="de-AT" dirty="0"/>
               <a:t>)</a:t>
             </a:r>
           </a:p>
@@ -28523,7 +28545,7 @@
               <a:defRPr/>
             </a:pPr>
             <a:r>
-              <a:rPr lang="de-AT" smtClean="0"/>
+              <a:rPr lang="de-AT"/>
               <a:t>Funktionen</a:t>
             </a:r>
           </a:p>
@@ -29426,12 +29448,6 @@
               </a:rPr>
               <a:t>return-</a:t>
             </a:r>
-            <a:r>
-              <a:rPr lang="de-AT" altLang="de-DE" sz="2000">
-                <a:latin typeface="Calibri" panose="020F0502020204030204" pitchFamily="34" charset="0"/>
-              </a:rPr>
-              <a:t/>
-            </a:r>
             <a:br>
               <a:rPr lang="de-AT" altLang="de-DE" sz="2000">
                 <a:latin typeface="Calibri" panose="020F0502020204030204" pitchFamily="34" charset="0"/>
@@ -29753,13 +29769,6 @@
   <p:clrMapOvr>
     <a:masterClrMapping/>
   </p:clrMapOvr>
-  <p:timing>
-    <p:tnLst>
-      <p:par>
-        <p:cTn id="1" dur="indefinite" restart="never" nodeType="tmRoot"/>
-      </p:par>
-    </p:tnLst>
-  </p:timing>
 </p:sld>
 </file>
 
@@ -30749,7 +30758,7 @@
               <a:defRPr/>
             </a:pPr>
             <a:r>
-              <a:rPr lang="de-AT" smtClean="0"/>
+              <a:rPr lang="de-AT"/>
               <a:t>Weiteres Beispiel</a:t>
             </a:r>
           </a:p>
@@ -30921,13 +30930,6 @@
   <p:clrMapOvr>
     <a:masterClrMapping/>
   </p:clrMapOvr>
-  <p:timing>
-    <p:tnLst>
-      <p:par>
-        <p:cTn id="1" dur="indefinite" restart="never" nodeType="tmRoot"/>
-      </p:par>
-    </p:tnLst>
-  </p:timing>
 </p:sld>
 </file>
 
@@ -30967,7 +30969,7 @@
               <a:defRPr/>
             </a:pPr>
             <a:r>
-              <a:rPr lang="de-AT" smtClean="0"/>
+              <a:rPr lang="de-AT"/>
               <a:t>Return in Prozeduren</a:t>
             </a:r>
           </a:p>
@@ -31864,25 +31866,25 @@
               <a:defRPr/>
             </a:pPr>
             <a:r>
-              <a:rPr lang="de-AT" sz="2000" dirty="0" smtClean="0">
+              <a:rPr lang="de-AT" sz="2000" dirty="0">
                 <a:latin typeface="Calibri" pitchFamily="34" charset="0"/>
               </a:rPr>
               <a:t>Funktionen	</a:t>
             </a:r>
             <a:r>
-              <a:rPr lang="de-AT" sz="2000" u="sng" dirty="0" smtClean="0">
+              <a:rPr lang="de-AT" sz="2000" u="sng" dirty="0">
                 <a:latin typeface="Calibri" pitchFamily="34" charset="0"/>
               </a:rPr>
               <a:t>müssen</a:t>
             </a:r>
             <a:r>
-              <a:rPr lang="de-AT" sz="2000" dirty="0" smtClean="0">
+              <a:rPr lang="de-AT" sz="2000" dirty="0">
                 <a:latin typeface="Calibri" pitchFamily="34" charset="0"/>
               </a:rPr>
               <a:t> mit </a:t>
             </a:r>
             <a:r>
-              <a:rPr lang="de-AT" sz="2000" dirty="0" err="1" smtClean="0">
+              <a:rPr lang="de-AT" sz="2000" dirty="0" err="1">
                 <a:solidFill>
                   <a:schemeClr val="accent6"/>
                 </a:solidFill>
@@ -31891,7 +31893,7 @@
               <a:t>return</a:t>
             </a:r>
             <a:r>
-              <a:rPr lang="de-AT" sz="2000" dirty="0" smtClean="0">
+              <a:rPr lang="de-AT" sz="2000" dirty="0">
                 <a:solidFill>
                   <a:schemeClr val="accent6"/>
                 </a:solidFill>
@@ -31900,7 +31902,7 @@
               <a:t> </a:t>
             </a:r>
             <a:r>
-              <a:rPr lang="de-AT" sz="2000" dirty="0" smtClean="0">
+              <a:rPr lang="de-AT" sz="2000" dirty="0">
                 <a:latin typeface="Calibri" pitchFamily="34" charset="0"/>
               </a:rPr>
               <a:t>beendet werden</a:t>
@@ -31911,25 +31913,25 @@
               <a:defRPr/>
             </a:pPr>
             <a:r>
-              <a:rPr lang="de-AT" sz="2000" dirty="0" smtClean="0">
+              <a:rPr lang="de-AT" sz="2000" dirty="0">
                 <a:latin typeface="Calibri" pitchFamily="34" charset="0"/>
               </a:rPr>
               <a:t>Prozeduren	</a:t>
             </a:r>
             <a:r>
-              <a:rPr lang="de-AT" sz="2000" u="sng" dirty="0" smtClean="0">
+              <a:rPr lang="de-AT" sz="2000" u="sng" dirty="0">
                 <a:latin typeface="Calibri" pitchFamily="34" charset="0"/>
               </a:rPr>
               <a:t>können</a:t>
             </a:r>
             <a:r>
-              <a:rPr lang="de-AT" sz="2000" dirty="0" smtClean="0">
+              <a:rPr lang="de-AT" sz="2000" dirty="0">
                 <a:latin typeface="Calibri" pitchFamily="34" charset="0"/>
               </a:rPr>
               <a:t> mit </a:t>
             </a:r>
             <a:r>
-              <a:rPr lang="de-AT" sz="2000" dirty="0" err="1" smtClean="0">
+              <a:rPr lang="de-AT" sz="2000" dirty="0" err="1">
                 <a:solidFill>
                   <a:schemeClr val="accent6"/>
                 </a:solidFill>
@@ -31938,7 +31940,7 @@
               <a:t>return</a:t>
             </a:r>
             <a:r>
-              <a:rPr lang="de-AT" sz="2000" dirty="0" smtClean="0">
+              <a:rPr lang="de-AT" sz="2000" dirty="0">
                 <a:solidFill>
                   <a:schemeClr val="accent6"/>
                 </a:solidFill>
@@ -31947,7 +31949,7 @@
               <a:t> </a:t>
             </a:r>
             <a:r>
-              <a:rPr lang="de-AT" sz="2000" dirty="0" smtClean="0">
+              <a:rPr lang="de-AT" sz="2000" dirty="0">
                 <a:latin typeface="Calibri" pitchFamily="34" charset="0"/>
               </a:rPr>
               <a:t>beendet werden</a:t>
@@ -31960,13 +31962,6 @@
   <p:clrMapOvr>
     <a:masterClrMapping/>
   </p:clrMapOvr>
-  <p:timing>
-    <p:tnLst>
-      <p:par>
-        <p:cTn id="1" dur="indefinite" restart="never" nodeType="tmRoot"/>
-      </p:par>
-    </p:tnLst>
-  </p:timing>
 </p:sld>
 </file>
 
@@ -32006,7 +32001,7 @@
               <a:defRPr/>
             </a:pPr>
             <a:r>
-              <a:rPr lang="de-AT" smtClean="0"/>
+              <a:rPr lang="de-AT"/>
               <a:t>Lokale und statische Variablen</a:t>
             </a:r>
           </a:p>
@@ -33098,13 +33093,6 @@
   <p:clrMapOvr>
     <a:masterClrMapping/>
   </p:clrMapOvr>
-  <p:timing>
-    <p:tnLst>
-      <p:par>
-        <p:cTn id="1" dur="indefinite" restart="never" nodeType="tmRoot"/>
-      </p:par>
-    </p:tnLst>
-  </p:timing>
 </p:sld>
 </file>
 
@@ -33144,7 +33132,7 @@
               <a:defRPr/>
             </a:pPr>
             <a:r>
-              <a:rPr lang="de-AT" smtClean="0"/>
+              <a:rPr lang="de-AT"/>
               <a:t>Beispiel: Summe einer Zahlenfolge</a:t>
             </a:r>
           </a:p>
@@ -34746,12 +34734,6 @@
                   <a:latin typeface="Calibri" panose="020F0502020204030204" pitchFamily="34" charset="0"/>
                 </a:rPr>
                 <a:t>Add</a:t>
-              </a:r>
-              <a:r>
-                <a:rPr lang="de-AT" altLang="de-DE" sz="1600">
-                  <a:latin typeface="Calibri" panose="020F0502020204030204" pitchFamily="34" charset="0"/>
-                </a:rPr>
-                <a:t/>
               </a:r>
               <a:br>
                 <a:rPr lang="de-AT" altLang="de-DE" sz="1600">
@@ -35059,7 +35041,7 @@
               <a:defRPr/>
             </a:pPr>
             <a:r>
-              <a:rPr lang="de-AT" smtClean="0"/>
+              <a:rPr lang="de-AT"/>
               <a:t>Sichtbarkeitsbereich von Namen</a:t>
             </a:r>
           </a:p>
